--- a/CSCI250-Fall2026/content/Week12_AI-Assisted-Coding-ClaudeCode/slides.pptx
+++ b/CSCI250-Fall2026/content/Week12_AI-Assisted-Coding-ClaudeCode/slides.pptx
@@ -4986,7 +4986,7 @@
                 </a:solidFill>
                 <a:latin typeface="Calibri"/>
               </a:rPr>
-              <a:t>✓ Submit Lab A6 + reflection by Sunday 11:59 PM PT</a:t>
+              <a:t>✓ Submit Lab A9 + reflection by Sunday 11:59 PM PT</a:t>
             </a:r>
           </a:p>
         </p:txBody>
@@ -5324,7 +5324,7 @@
                 </a:solidFill>
                 <a:latin typeface="Calibri"/>
               </a:rPr>
-              <a:t>• Lab A6: finish a TESTED feature with AI help</a:t>
+              <a:t>• Lab A9: finish a TESTED feature with AI help</a:t>
             </a:r>
           </a:p>
         </p:txBody>
